--- a/Programming01/Session04/slides-fr.pptx
+++ b/Programming01/Session04/slides-fr.pptx
@@ -7317,7 +7317,7 @@
             </a:pPr>
             <a:r>
               <a:rPr/>
-              <a:t>Le tableau avant le graphique</a:t>
+              <a:t>Données</a:t>
             </a:r>
           </a:p>
         </p:txBody>
